--- a/docs/발표/카페인제주_RAG_발표＿ｖ２.pptx
+++ b/docs/발표/카페인제주_RAG_발표＿ｖ２.pptx
@@ -26345,67 +26345,40 @@
           </a:p>
         </p:txBody>
       </p:sp>
-      <p:pic>
-        <p:nvPicPr>
-          <p:cNvPr id="35" name="그림 34">
-            <a:extLst>
-              <a:ext uri="{FF2B5EF4-FFF2-40B4-BE49-F238E27FC236}">
-                <a16:creationId xmlns:a16="http://schemas.microsoft.com/office/drawing/2014/main" id="{88F838F7-1B67-5819-002A-44DA544D9215}"/>
-              </a:ext>
-            </a:extLst>
-          </p:cNvPr>
-          <p:cNvPicPr>
-            <a:picLocks noChangeAspect="1"/>
-          </p:cNvPicPr>
-          <p:nvPr/>
-        </p:nvPicPr>
-        <p:blipFill>
-          <a:blip r:embed="rId3"/>
-          <a:stretch>
-            <a:fillRect/>
-          </a:stretch>
-        </p:blipFill>
-        <p:spPr>
-          <a:xfrm>
-            <a:off x="1046549" y="1290491"/>
-            <a:ext cx="6883052" cy="3776756"/>
-          </a:xfrm>
-          <a:prstGeom prst="rect">
-            <a:avLst/>
-          </a:prstGeom>
-        </p:spPr>
-      </p:pic>
-      <p:sp>
-        <p:nvSpPr>
-          <p:cNvPr id="37" name="직사각형 36">
-            <a:extLst>
-              <a:ext uri="{FF2B5EF4-FFF2-40B4-BE49-F238E27FC236}">
-                <a16:creationId xmlns:a16="http://schemas.microsoft.com/office/drawing/2014/main" id="{CDD73A07-324A-80FF-DFA1-0C51A1BB589B}"/>
-              </a:ext>
-            </a:extLst>
-          </p:cNvPr>
-          <p:cNvSpPr/>
-          <p:nvPr/>
-        </p:nvSpPr>
-        <p:spPr>
-          <a:xfrm>
-            <a:off x="4052169" y="198378"/>
-            <a:ext cx="4753627" cy="1198274"/>
-          </a:xfrm>
-          <a:prstGeom prst="rect">
-            <a:avLst/>
-          </a:prstGeom>
+      <p:sp>
+        <p:nvSpPr>
+          <p:cNvPr id="34" name="Rounded Rectangle 33"/>
+          <p:cNvSpPr/>
+          <p:nvPr/>
+        </p:nvSpPr>
+        <p:spPr>
+          <a:xfrm>
+            <a:off x="502920" y="1188720"/>
+            <a:ext cx="8138160" cy="457200"/>
+          </a:xfrm>
+          <a:prstGeom prst="roundRect">
+            <a:avLst>
+              <a:gd name="adj" fmla="val 10000"/>
+            </a:avLst>
+          </a:prstGeom>
+          <a:solidFill>
+            <a:srgbClr val="FFFFFF"/>
+          </a:solidFill>
+          <a:ln w="12700">
+            <a:solidFill>
+              <a:srgbClr val="DCE6E3"/>
+            </a:solidFill>
+          </a:ln>
+          <a:effectLst/>
         </p:spPr>
         <p:style>
-          <a:lnRef idx="2">
-            <a:schemeClr val="accent1">
-              <a:shade val="15000"/>
-            </a:schemeClr>
+          <a:lnRef idx="1">
+            <a:schemeClr val="accent1"/>
           </a:lnRef>
-          <a:fillRef idx="1">
+          <a:fillRef idx="3">
             <a:schemeClr val="accent1"/>
           </a:fillRef>
-          <a:effectRef idx="0">
+          <a:effectRef idx="2">
             <a:schemeClr val="accent1"/>
           </a:effectRef>
           <a:fontRef idx="minor">
@@ -26417,59 +26390,1133 @@
           <a:lstStyle/>
           <a:p>
             <a:pPr algn="ctr"/>
-            <a:r>
-              <a:rPr lang="ko-KR" altLang="en-US" dirty="0"/>
-              <a:t>묻고，　고르고，　원문　제시하는</a:t>
-            </a:r>
-            <a:endParaRPr lang="en-US" altLang="ko-KR" dirty="0"/>
-          </a:p>
+          </a:p>
+        </p:txBody>
+      </p:sp>
+      <p:sp>
+        <p:nvSpPr>
+          <p:cNvPr id="35" name="TextBox 34"/>
+          <p:cNvSpPr txBox="1"/>
+          <p:nvPr/>
+        </p:nvSpPr>
+        <p:spPr>
+          <a:xfrm>
+            <a:off x="685800" y="1188720"/>
+            <a:ext cx="914400" cy="457200"/>
+          </a:xfrm>
+          <a:prstGeom prst="rect">
+            <a:avLst/>
+          </a:prstGeom>
+          <a:noFill/>
+        </p:spPr>
+        <p:txBody>
+          <a:bodyPr wrap="square" anchor="ctr" lIns="0" rIns="0" tIns="0" bIns="0">
+            <a:spAutoFit/>
+          </a:bodyPr>
+          <a:lstStyle/>
+          <a:p>
+            <a:pPr algn="l"/>
+            <a:r>
+              <a:rPr sz="900" b="1">
+                <a:solidFill>
+                  <a:srgbClr val="5F7175"/>
+                </a:solidFill>
+                <a:latin typeface="맑은 고딕"/>
+                <a:ea typeface="맑은 고딕"/>
+                <a:cs typeface="맑은 고딕"/>
+              </a:rPr>
+              <a:t>입력</a:t>
+            </a:r>
+          </a:p>
+        </p:txBody>
+      </p:sp>
+      <p:sp>
+        <p:nvSpPr>
+          <p:cNvPr id="36" name="TextBox 35"/>
+          <p:cNvSpPr txBox="1"/>
+          <p:nvPr/>
+        </p:nvSpPr>
+        <p:spPr>
+          <a:xfrm>
+            <a:off x="1280160" y="1188720"/>
+            <a:ext cx="4937760" cy="457200"/>
+          </a:xfrm>
+          <a:prstGeom prst="rect">
+            <a:avLst/>
+          </a:prstGeom>
+          <a:noFill/>
+        </p:spPr>
+        <p:txBody>
+          <a:bodyPr wrap="square" anchor="ctr" lIns="0" rIns="0" tIns="0" bIns="0">
+            <a:spAutoFit/>
+          </a:bodyPr>
+          <a:lstStyle/>
+          <a:p>
+            <a:pPr algn="l"/>
+            <a:r>
+              <a:rPr sz="1300" b="1">
+                <a:solidFill>
+                  <a:srgbClr val="1F2933"/>
+                </a:solidFill>
+                <a:latin typeface="맑은 고딕"/>
+                <a:ea typeface="맑은 고딕"/>
+                <a:cs typeface="맑은 고딕"/>
+              </a:rPr>
+              <a:t>“애월에서 노을 보기 좋은 조용한 카페”</a:t>
+            </a:r>
+          </a:p>
+        </p:txBody>
+      </p:sp>
+      <p:sp>
+        <p:nvSpPr>
+          <p:cNvPr id="37" name="TextBox 36"/>
+          <p:cNvSpPr txBox="1"/>
+          <p:nvPr/>
+        </p:nvSpPr>
+        <p:spPr>
+          <a:xfrm>
+            <a:off x="5715000" y="1188720"/>
+            <a:ext cx="2743200" cy="457200"/>
+          </a:xfrm>
+          <a:prstGeom prst="rect">
+            <a:avLst/>
+          </a:prstGeom>
+          <a:noFill/>
+        </p:spPr>
+        <p:txBody>
+          <a:bodyPr wrap="square" anchor="ctr" lIns="0" rIns="0" tIns="0" bIns="0">
+            <a:spAutoFit/>
+          </a:bodyPr>
+          <a:lstStyle/>
+          <a:p>
+            <a:pPr algn="r"/>
+            <a:r>
+              <a:rPr sz="900">
+                <a:solidFill>
+                  <a:srgbClr val="9AA9AC"/>
+                </a:solidFill>
+                <a:latin typeface="맑은 고딕"/>
+                <a:ea typeface="맑은 고딕"/>
+                <a:cs typeface="맑은 고딕"/>
+              </a:rPr>
+              <a:t>사용자의 자연어 질문 하나</a:t>
+            </a:r>
+          </a:p>
+        </p:txBody>
+      </p:sp>
+      <p:sp>
+        <p:nvSpPr>
+          <p:cNvPr id="38" name="Rounded Rectangle 37"/>
+          <p:cNvSpPr/>
+          <p:nvPr/>
+        </p:nvSpPr>
+        <p:spPr>
+          <a:xfrm>
+            <a:off x="502920" y="1874519"/>
+            <a:ext cx="2529840" cy="2148840"/>
+          </a:xfrm>
+          <a:prstGeom prst="roundRect">
+            <a:avLst>
+              <a:gd name="adj" fmla="val 5000"/>
+            </a:avLst>
+          </a:prstGeom>
+          <a:solidFill>
+            <a:srgbClr val="FCEEE0"/>
+          </a:solidFill>
+          <a:ln w="12700">
+            <a:solidFill>
+              <a:srgbClr val="DCE6E3"/>
+            </a:solidFill>
+          </a:ln>
+          <a:effectLst/>
+        </p:spPr>
+        <p:style>
+          <a:lnRef idx="1">
+            <a:schemeClr val="accent1"/>
+          </a:lnRef>
+          <a:fillRef idx="3">
+            <a:schemeClr val="accent1"/>
+          </a:fillRef>
+          <a:effectRef idx="2">
+            <a:schemeClr val="accent1"/>
+          </a:effectRef>
+          <a:fontRef idx="minor">
+            <a:schemeClr val="lt1"/>
+          </a:fontRef>
+        </p:style>
+        <p:txBody>
+          <a:bodyPr rtlCol="0" anchor="ctr"/>
+          <a:lstStyle/>
           <a:p>
             <a:pPr algn="ctr"/>
-            <a:r>
-              <a:rPr lang="ko-KR" altLang="en-US" dirty="0"/>
-              <a:t>모델의　구조를　간단히　</a:t>
-            </a:r>
-            <a:r>
-              <a:rPr lang="ko-KR" altLang="en-US" dirty="0" err="1"/>
-              <a:t>보여줄수</a:t>
-            </a:r>
-            <a:r>
-              <a:rPr lang="ko-KR" altLang="en-US" dirty="0"/>
-              <a:t>　</a:t>
-            </a:r>
-            <a:r>
-              <a:rPr lang="ko-KR" altLang="en-US" dirty="0" err="1"/>
-              <a:t>있을지요</a:t>
-            </a:r>
-            <a:r>
-              <a:rPr lang="ko-KR" altLang="en-US" dirty="0"/>
-              <a:t>？</a:t>
-            </a:r>
-            <a:endParaRPr lang="en-US" altLang="ko-KR" dirty="0"/>
-          </a:p>
+          </a:p>
+        </p:txBody>
+      </p:sp>
+      <p:sp>
+        <p:nvSpPr>
+          <p:cNvPr id="39" name="Rounded Rectangle 38"/>
+          <p:cNvSpPr/>
+          <p:nvPr/>
+        </p:nvSpPr>
+        <p:spPr>
+          <a:xfrm>
+            <a:off x="502920" y="1874519"/>
+            <a:ext cx="2529840" cy="365760"/>
+          </a:xfrm>
+          <a:prstGeom prst="roundRect">
+            <a:avLst>
+              <a:gd name="adj" fmla="val 5000"/>
+            </a:avLst>
+          </a:prstGeom>
+          <a:solidFill>
+            <a:srgbClr val="E8842B"/>
+          </a:solidFill>
+          <a:ln>
+            <a:noFill/>
+          </a:ln>
+          <a:effectLst/>
+        </p:spPr>
+        <p:style>
+          <a:lnRef idx="1">
+            <a:schemeClr val="accent1"/>
+          </a:lnRef>
+          <a:fillRef idx="3">
+            <a:schemeClr val="accent1"/>
+          </a:fillRef>
+          <a:effectRef idx="2">
+            <a:schemeClr val="accent1"/>
+          </a:effectRef>
+          <a:fontRef idx="minor">
+            <a:schemeClr val="lt1"/>
+          </a:fontRef>
+        </p:style>
+        <p:txBody>
+          <a:bodyPr rtlCol="0" anchor="ctr"/>
+          <a:lstStyle/>
           <a:p>
             <a:pPr algn="ctr"/>
-            <a:r>
-              <a:rPr lang="ko-KR" altLang="en-US" dirty="0"/>
-              <a:t>（</a:t>
-            </a:r>
-            <a:r>
-              <a:rPr lang="ko-KR" altLang="en-US" dirty="0" err="1"/>
-              <a:t>뒷페이지</a:t>
-            </a:r>
-            <a:r>
-              <a:rPr lang="ko-KR" altLang="en-US" dirty="0"/>
-              <a:t>　내용과　일부　겹쳐도　</a:t>
-            </a:r>
-            <a:r>
-              <a:rPr lang="ko-KR" altLang="en-US" dirty="0" err="1"/>
-              <a:t>Ｏｋ</a:t>
-            </a:r>
-            <a:r>
-              <a:rPr lang="ko-KR" altLang="en-US" dirty="0"/>
-              <a:t>）</a:t>
-            </a:r>
-            <a:endParaRPr lang="en-US" altLang="ko-KR" dirty="0"/>
+          </a:p>
+        </p:txBody>
+      </p:sp>
+      <p:sp>
+        <p:nvSpPr>
+          <p:cNvPr id="40" name="TextBox 39"/>
+          <p:cNvSpPr txBox="1"/>
+          <p:nvPr/>
+        </p:nvSpPr>
+        <p:spPr>
+          <a:xfrm>
+            <a:off x="502920" y="1874519"/>
+            <a:ext cx="2529840" cy="365760"/>
+          </a:xfrm>
+          <a:prstGeom prst="rect">
+            <a:avLst/>
+          </a:prstGeom>
+          <a:noFill/>
+        </p:spPr>
+        <p:txBody>
+          <a:bodyPr wrap="square" anchor="ctr" lIns="0" rIns="0" tIns="0" bIns="0">
+            <a:spAutoFit/>
+          </a:bodyPr>
+          <a:lstStyle/>
+          <a:p>
+            <a:pPr algn="ctr"/>
+            <a:r>
+              <a:rPr sz="1000" b="1">
+                <a:solidFill>
+                  <a:srgbClr val="FFFFFF"/>
+                </a:solidFill>
+                <a:latin typeface="맑은 고딕"/>
+                <a:ea typeface="맑은 고딕"/>
+                <a:cs typeface="맑은 고딕"/>
+              </a:rPr>
+              <a:t>STEP 1 · 묻고</a:t>
+            </a:r>
+          </a:p>
+        </p:txBody>
+      </p:sp>
+      <p:sp>
+        <p:nvSpPr>
+          <p:cNvPr id="41" name="TextBox 40"/>
+          <p:cNvSpPr txBox="1"/>
+          <p:nvPr/>
+        </p:nvSpPr>
+        <p:spPr>
+          <a:xfrm>
+            <a:off x="685800" y="2350008"/>
+            <a:ext cx="2255520" cy="274320"/>
+          </a:xfrm>
+          <a:prstGeom prst="rect">
+            <a:avLst/>
+          </a:prstGeom>
+          <a:noFill/>
+        </p:spPr>
+        <p:txBody>
+          <a:bodyPr wrap="square" anchor="t" lIns="0" rIns="0" tIns="0" bIns="0">
+            <a:spAutoFit/>
+          </a:bodyPr>
+          <a:lstStyle/>
+          <a:p>
+            <a:pPr algn="l"/>
+            <a:r>
+              <a:rPr sz="1150" b="1">
+                <a:solidFill>
+                  <a:srgbClr val="B5651D"/>
+                </a:solidFill>
+                <a:latin typeface="맑은 고딕"/>
+                <a:ea typeface="맑은 고딕"/>
+                <a:cs typeface="맑은 고딕"/>
+              </a:rPr>
+              <a:t>LLM ①  의도 분석</a:t>
+            </a:r>
+          </a:p>
+        </p:txBody>
+      </p:sp>
+      <p:sp>
+        <p:nvSpPr>
+          <p:cNvPr id="42" name="TextBox 41"/>
+          <p:cNvSpPr txBox="1"/>
+          <p:nvPr/>
+        </p:nvSpPr>
+        <p:spPr>
+          <a:xfrm>
+            <a:off x="685800" y="2734056"/>
+            <a:ext cx="2209800" cy="1234440"/>
+          </a:xfrm>
+          <a:prstGeom prst="rect">
+            <a:avLst/>
+          </a:prstGeom>
+          <a:noFill/>
+        </p:spPr>
+        <p:txBody>
+          <a:bodyPr wrap="square" anchor="t" lIns="0" rIns="0" tIns="0" bIns="0">
+            <a:spAutoFit/>
+          </a:bodyPr>
+          <a:lstStyle/>
+          <a:p>
+            <a:pPr algn="l">
+              <a:lnSpc>
+                <a:spcPct val="118000"/>
+              </a:lnSpc>
+            </a:pPr>
+            <a:r>
+              <a:rPr sz="919">
+                <a:solidFill>
+                  <a:srgbClr val="1F2933"/>
+                </a:solidFill>
+                <a:latin typeface="맑은 고딕"/>
+                <a:ea typeface="맑은 고딕"/>
+                <a:cs typeface="맑은 고딕"/>
+              </a:rPr>
+              <a:t>자연어 질문을 구조로 분해</a:t>
+            </a:r>
+          </a:p>
+          <a:p>
+            <a:pPr algn="l">
+              <a:lnSpc>
+                <a:spcPct val="118000"/>
+              </a:lnSpc>
+            </a:pPr>
+            <a:r>
+              <a:rPr sz="919">
+                <a:solidFill>
+                  <a:srgbClr val="1F2933"/>
+                </a:solidFill>
+                <a:latin typeface="맑은 고딕"/>
+                <a:ea typeface="맑은 고딕"/>
+                <a:cs typeface="맑은 고딕"/>
+              </a:rPr>
+              <a:t/>
+            </a:r>
+          </a:p>
+          <a:p>
+            <a:pPr algn="l">
+              <a:lnSpc>
+                <a:spcPct val="118000"/>
+              </a:lnSpc>
+            </a:pPr>
+            <a:r>
+              <a:rPr sz="919">
+                <a:solidFill>
+                  <a:srgbClr val="1F2933"/>
+                </a:solidFill>
+                <a:latin typeface="맑은 고딕"/>
+                <a:ea typeface="맑은 고딕"/>
+                <a:cs typeface="맑은 고딕"/>
+              </a:rPr>
+              <a:t>지역 / 하드조건 / 소프트조건</a:t>
+            </a:r>
+          </a:p>
+          <a:p>
+            <a:pPr algn="l">
+              <a:lnSpc>
+                <a:spcPct val="118000"/>
+              </a:lnSpc>
+            </a:pPr>
+            <a:r>
+              <a:rPr sz="919">
+                <a:solidFill>
+                  <a:srgbClr val="1F2933"/>
+                </a:solidFill>
+                <a:latin typeface="맑은 고딕"/>
+                <a:ea typeface="맑은 고딕"/>
+                <a:cs typeface="맑은 고딕"/>
+              </a:rPr>
+              <a:t>{ 지역: 애월,</a:t>
+            </a:r>
+          </a:p>
+          <a:p>
+            <a:pPr algn="l">
+              <a:lnSpc>
+                <a:spcPct val="118000"/>
+              </a:lnSpc>
+            </a:pPr>
+            <a:r>
+              <a:rPr sz="919">
+                <a:solidFill>
+                  <a:srgbClr val="1F2933"/>
+                </a:solidFill>
+                <a:latin typeface="맑은 고딕"/>
+                <a:ea typeface="맑은 고딕"/>
+                <a:cs typeface="맑은 고딕"/>
+              </a:rPr>
+              <a:t>   소프트: [노을, 조용함] }</a:t>
+            </a:r>
+          </a:p>
+        </p:txBody>
+      </p:sp>
+      <p:sp>
+        <p:nvSpPr>
+          <p:cNvPr id="43" name="Rounded Rectangle 42"/>
+          <p:cNvSpPr/>
+          <p:nvPr/>
+        </p:nvSpPr>
+        <p:spPr>
+          <a:xfrm>
+            <a:off x="3307080" y="1874519"/>
+            <a:ext cx="2529840" cy="2148840"/>
+          </a:xfrm>
+          <a:prstGeom prst="roundRect">
+            <a:avLst>
+              <a:gd name="adj" fmla="val 5000"/>
+            </a:avLst>
+          </a:prstGeom>
+          <a:solidFill>
+            <a:srgbClr val="E7F3F1"/>
+          </a:solidFill>
+          <a:ln w="12700">
+            <a:solidFill>
+              <a:srgbClr val="DCE6E3"/>
+            </a:solidFill>
+          </a:ln>
+          <a:effectLst/>
+        </p:spPr>
+        <p:style>
+          <a:lnRef idx="1">
+            <a:schemeClr val="accent1"/>
+          </a:lnRef>
+          <a:fillRef idx="3">
+            <a:schemeClr val="accent1"/>
+          </a:fillRef>
+          <a:effectRef idx="2">
+            <a:schemeClr val="accent1"/>
+          </a:effectRef>
+          <a:fontRef idx="minor">
+            <a:schemeClr val="lt1"/>
+          </a:fontRef>
+        </p:style>
+        <p:txBody>
+          <a:bodyPr rtlCol="0" anchor="ctr"/>
+          <a:lstStyle/>
+          <a:p>
+            <a:pPr algn="ctr"/>
+          </a:p>
+        </p:txBody>
+      </p:sp>
+      <p:sp>
+        <p:nvSpPr>
+          <p:cNvPr id="44" name="Rounded Rectangle 43"/>
+          <p:cNvSpPr/>
+          <p:nvPr/>
+        </p:nvSpPr>
+        <p:spPr>
+          <a:xfrm>
+            <a:off x="3307080" y="1874519"/>
+            <a:ext cx="2529840" cy="365760"/>
+          </a:xfrm>
+          <a:prstGeom prst="roundRect">
+            <a:avLst>
+              <a:gd name="adj" fmla="val 5000"/>
+            </a:avLst>
+          </a:prstGeom>
+          <a:solidFill>
+            <a:srgbClr val="168A7E"/>
+          </a:solidFill>
+          <a:ln>
+            <a:noFill/>
+          </a:ln>
+          <a:effectLst/>
+        </p:spPr>
+        <p:style>
+          <a:lnRef idx="1">
+            <a:schemeClr val="accent1"/>
+          </a:lnRef>
+          <a:fillRef idx="3">
+            <a:schemeClr val="accent1"/>
+          </a:fillRef>
+          <a:effectRef idx="2">
+            <a:schemeClr val="accent1"/>
+          </a:effectRef>
+          <a:fontRef idx="minor">
+            <a:schemeClr val="lt1"/>
+          </a:fontRef>
+        </p:style>
+        <p:txBody>
+          <a:bodyPr rtlCol="0" anchor="ctr"/>
+          <a:lstStyle/>
+          <a:p>
+            <a:pPr algn="ctr"/>
+          </a:p>
+        </p:txBody>
+      </p:sp>
+      <p:sp>
+        <p:nvSpPr>
+          <p:cNvPr id="45" name="TextBox 44"/>
+          <p:cNvSpPr txBox="1"/>
+          <p:nvPr/>
+        </p:nvSpPr>
+        <p:spPr>
+          <a:xfrm>
+            <a:off x="3307080" y="1874519"/>
+            <a:ext cx="2529840" cy="365760"/>
+          </a:xfrm>
+          <a:prstGeom prst="rect">
+            <a:avLst/>
+          </a:prstGeom>
+          <a:noFill/>
+        </p:spPr>
+        <p:txBody>
+          <a:bodyPr wrap="square" anchor="ctr" lIns="0" rIns="0" tIns="0" bIns="0">
+            <a:spAutoFit/>
+          </a:bodyPr>
+          <a:lstStyle/>
+          <a:p>
+            <a:pPr algn="ctr"/>
+            <a:r>
+              <a:rPr sz="1000" b="1">
+                <a:solidFill>
+                  <a:srgbClr val="FFFFFF"/>
+                </a:solidFill>
+                <a:latin typeface="맑은 고딕"/>
+                <a:ea typeface="맑은 고딕"/>
+                <a:cs typeface="맑은 고딕"/>
+              </a:rPr>
+              <a:t>STEP 2 · 고르고</a:t>
+            </a:r>
+          </a:p>
+        </p:txBody>
+      </p:sp>
+      <p:sp>
+        <p:nvSpPr>
+          <p:cNvPr id="46" name="TextBox 45"/>
+          <p:cNvSpPr txBox="1"/>
+          <p:nvPr/>
+        </p:nvSpPr>
+        <p:spPr>
+          <a:xfrm>
+            <a:off x="3489960" y="2350008"/>
+            <a:ext cx="2255520" cy="274320"/>
+          </a:xfrm>
+          <a:prstGeom prst="rect">
+            <a:avLst/>
+          </a:prstGeom>
+          <a:noFill/>
+        </p:spPr>
+        <p:txBody>
+          <a:bodyPr wrap="square" anchor="t" lIns="0" rIns="0" tIns="0" bIns="0">
+            <a:spAutoFit/>
+          </a:bodyPr>
+          <a:lstStyle/>
+          <a:p>
+            <a:pPr algn="l"/>
+            <a:r>
+              <a:rPr sz="1150" b="1">
+                <a:solidFill>
+                  <a:srgbClr val="168A7E"/>
+                </a:solidFill>
+                <a:latin typeface="맑은 고딕"/>
+                <a:ea typeface="맑은 고딕"/>
+                <a:cs typeface="맑은 고딕"/>
+              </a:rPr>
+              <a:t>코드  (LLM 없음)</a:t>
+            </a:r>
+          </a:p>
+        </p:txBody>
+      </p:sp>
+      <p:sp>
+        <p:nvSpPr>
+          <p:cNvPr id="47" name="TextBox 46"/>
+          <p:cNvSpPr txBox="1"/>
+          <p:nvPr/>
+        </p:nvSpPr>
+        <p:spPr>
+          <a:xfrm>
+            <a:off x="3489960" y="2734056"/>
+            <a:ext cx="2209800" cy="1234440"/>
+          </a:xfrm>
+          <a:prstGeom prst="rect">
+            <a:avLst/>
+          </a:prstGeom>
+          <a:noFill/>
+        </p:spPr>
+        <p:txBody>
+          <a:bodyPr wrap="square" anchor="t" lIns="0" rIns="0" tIns="0" bIns="0">
+            <a:spAutoFit/>
+          </a:bodyPr>
+          <a:lstStyle/>
+          <a:p>
+            <a:pPr algn="l">
+              <a:lnSpc>
+                <a:spcPct val="118000"/>
+              </a:lnSpc>
+            </a:pPr>
+            <a:r>
+              <a:rPr sz="919">
+                <a:solidFill>
+                  <a:srgbClr val="0F5257"/>
+                </a:solidFill>
+                <a:latin typeface="맑은 고딕"/>
+                <a:ea typeface="맑은 고딕"/>
+                <a:cs typeface="맑은 고딕"/>
+              </a:rPr>
+              <a:t>① 지역 필터 (주소 기반)</a:t>
+            </a:r>
+          </a:p>
+          <a:p>
+            <a:pPr algn="l">
+              <a:lnSpc>
+                <a:spcPct val="118000"/>
+              </a:lnSpc>
+            </a:pPr>
+            <a:r>
+              <a:rPr sz="919">
+                <a:solidFill>
+                  <a:srgbClr val="0F5257"/>
+                </a:solidFill>
+                <a:latin typeface="맑은 고딕"/>
+                <a:ea typeface="맑은 고딕"/>
+                <a:cs typeface="맑은 고딕"/>
+              </a:rPr>
+              <a:t>② 조건 번역 (임베딩=번역기)</a:t>
+            </a:r>
+          </a:p>
+          <a:p>
+            <a:pPr algn="l">
+              <a:lnSpc>
+                <a:spcPct val="118000"/>
+              </a:lnSpc>
+            </a:pPr>
+            <a:r>
+              <a:rPr sz="919">
+                <a:solidFill>
+                  <a:srgbClr val="0F5257"/>
+                </a:solidFill>
+                <a:latin typeface="맑은 고딕"/>
+                <a:ea typeface="맑은 고딕"/>
+                <a:cs typeface="맑은 고딕"/>
+              </a:rPr>
+              <a:t>③ 태그매칭 + 결정론 정렬</a:t>
+            </a:r>
+          </a:p>
+          <a:p>
+            <a:pPr algn="l">
+              <a:lnSpc>
+                <a:spcPct val="118000"/>
+              </a:lnSpc>
+            </a:pPr>
+            <a:r>
+              <a:rPr sz="919">
+                <a:solidFill>
+                  <a:srgbClr val="0F5257"/>
+                </a:solidFill>
+                <a:latin typeface="맑은 고딕"/>
+                <a:ea typeface="맑은 고딕"/>
+                <a:cs typeface="맑은 고딕"/>
+              </a:rPr>
+              <a:t>④ 0건이면 완화 사다리</a:t>
+            </a:r>
+          </a:p>
+          <a:p>
+            <a:pPr algn="l">
+              <a:lnSpc>
+                <a:spcPct val="118000"/>
+              </a:lnSpc>
+            </a:pPr>
+            <a:r>
+              <a:rPr sz="919">
+                <a:solidFill>
+                  <a:srgbClr val="0F5257"/>
+                </a:solidFill>
+                <a:latin typeface="맑은 고딕"/>
+                <a:ea typeface="맑은 고딕"/>
+                <a:cs typeface="맑은 고딕"/>
+              </a:rPr>
+              <a:t>→ 카드 5~8장 + 번역 로그</a:t>
+            </a:r>
+          </a:p>
+        </p:txBody>
+      </p:sp>
+      <p:sp>
+        <p:nvSpPr>
+          <p:cNvPr id="48" name="Rounded Rectangle 47"/>
+          <p:cNvSpPr/>
+          <p:nvPr/>
+        </p:nvSpPr>
+        <p:spPr>
+          <a:xfrm>
+            <a:off x="6111240" y="1874519"/>
+            <a:ext cx="2529840" cy="2148840"/>
+          </a:xfrm>
+          <a:prstGeom prst="roundRect">
+            <a:avLst>
+              <a:gd name="adj" fmla="val 5000"/>
+            </a:avLst>
+          </a:prstGeom>
+          <a:solidFill>
+            <a:srgbClr val="FCEEE0"/>
+          </a:solidFill>
+          <a:ln w="12700">
+            <a:solidFill>
+              <a:srgbClr val="DCE6E3"/>
+            </a:solidFill>
+          </a:ln>
+          <a:effectLst/>
+        </p:spPr>
+        <p:style>
+          <a:lnRef idx="1">
+            <a:schemeClr val="accent1"/>
+          </a:lnRef>
+          <a:fillRef idx="3">
+            <a:schemeClr val="accent1"/>
+          </a:fillRef>
+          <a:effectRef idx="2">
+            <a:schemeClr val="accent1"/>
+          </a:effectRef>
+          <a:fontRef idx="minor">
+            <a:schemeClr val="lt1"/>
+          </a:fontRef>
+        </p:style>
+        <p:txBody>
+          <a:bodyPr rtlCol="0" anchor="ctr"/>
+          <a:lstStyle/>
+          <a:p>
+            <a:pPr algn="ctr"/>
+          </a:p>
+        </p:txBody>
+      </p:sp>
+      <p:sp>
+        <p:nvSpPr>
+          <p:cNvPr id="49" name="Rounded Rectangle 48"/>
+          <p:cNvSpPr/>
+          <p:nvPr/>
+        </p:nvSpPr>
+        <p:spPr>
+          <a:xfrm>
+            <a:off x="6111240" y="1874519"/>
+            <a:ext cx="2529840" cy="365760"/>
+          </a:xfrm>
+          <a:prstGeom prst="roundRect">
+            <a:avLst>
+              <a:gd name="adj" fmla="val 5000"/>
+            </a:avLst>
+          </a:prstGeom>
+          <a:solidFill>
+            <a:srgbClr val="E8842B"/>
+          </a:solidFill>
+          <a:ln>
+            <a:noFill/>
+          </a:ln>
+          <a:effectLst/>
+        </p:spPr>
+        <p:style>
+          <a:lnRef idx="1">
+            <a:schemeClr val="accent1"/>
+          </a:lnRef>
+          <a:fillRef idx="3">
+            <a:schemeClr val="accent1"/>
+          </a:fillRef>
+          <a:effectRef idx="2">
+            <a:schemeClr val="accent1"/>
+          </a:effectRef>
+          <a:fontRef idx="minor">
+            <a:schemeClr val="lt1"/>
+          </a:fontRef>
+        </p:style>
+        <p:txBody>
+          <a:bodyPr rtlCol="0" anchor="ctr"/>
+          <a:lstStyle/>
+          <a:p>
+            <a:pPr algn="ctr"/>
+          </a:p>
+        </p:txBody>
+      </p:sp>
+      <p:sp>
+        <p:nvSpPr>
+          <p:cNvPr id="50" name="TextBox 49"/>
+          <p:cNvSpPr txBox="1"/>
+          <p:nvPr/>
+        </p:nvSpPr>
+        <p:spPr>
+          <a:xfrm>
+            <a:off x="6111240" y="1874519"/>
+            <a:ext cx="2529840" cy="365760"/>
+          </a:xfrm>
+          <a:prstGeom prst="rect">
+            <a:avLst/>
+          </a:prstGeom>
+          <a:noFill/>
+        </p:spPr>
+        <p:txBody>
+          <a:bodyPr wrap="square" anchor="ctr" lIns="0" rIns="0" tIns="0" bIns="0">
+            <a:spAutoFit/>
+          </a:bodyPr>
+          <a:lstStyle/>
+          <a:p>
+            <a:pPr algn="ctr"/>
+            <a:r>
+              <a:rPr sz="1000" b="1">
+                <a:solidFill>
+                  <a:srgbClr val="FFFFFF"/>
+                </a:solidFill>
+                <a:latin typeface="맑은 고딕"/>
+                <a:ea typeface="맑은 고딕"/>
+                <a:cs typeface="맑은 고딕"/>
+              </a:rPr>
+              <a:t>STEP 3 · 원문으로 증명</a:t>
+            </a:r>
+          </a:p>
+        </p:txBody>
+      </p:sp>
+      <p:sp>
+        <p:nvSpPr>
+          <p:cNvPr id="51" name="TextBox 50"/>
+          <p:cNvSpPr txBox="1"/>
+          <p:nvPr/>
+        </p:nvSpPr>
+        <p:spPr>
+          <a:xfrm>
+            <a:off x="6294120" y="2350008"/>
+            <a:ext cx="2255520" cy="274320"/>
+          </a:xfrm>
+          <a:prstGeom prst="rect">
+            <a:avLst/>
+          </a:prstGeom>
+          <a:noFill/>
+        </p:spPr>
+        <p:txBody>
+          <a:bodyPr wrap="square" anchor="t" lIns="0" rIns="0" tIns="0" bIns="0">
+            <a:spAutoFit/>
+          </a:bodyPr>
+          <a:lstStyle/>
+          <a:p>
+            <a:pPr algn="l"/>
+            <a:r>
+              <a:rPr sz="1150" b="1">
+                <a:solidFill>
+                  <a:srgbClr val="B5651D"/>
+                </a:solidFill>
+                <a:latin typeface="맑은 고딕"/>
+                <a:ea typeface="맑은 고딕"/>
+                <a:cs typeface="맑은 고딕"/>
+              </a:rPr>
+              <a:t>LLM ②  종합</a:t>
+            </a:r>
+          </a:p>
+        </p:txBody>
+      </p:sp>
+      <p:sp>
+        <p:nvSpPr>
+          <p:cNvPr id="52" name="TextBox 51"/>
+          <p:cNvSpPr txBox="1"/>
+          <p:nvPr/>
+        </p:nvSpPr>
+        <p:spPr>
+          <a:xfrm>
+            <a:off x="6294120" y="2734056"/>
+            <a:ext cx="2209800" cy="1234440"/>
+          </a:xfrm>
+          <a:prstGeom prst="rect">
+            <a:avLst/>
+          </a:prstGeom>
+          <a:noFill/>
+        </p:spPr>
+        <p:txBody>
+          <a:bodyPr wrap="square" anchor="t" lIns="0" rIns="0" tIns="0" bIns="0">
+            <a:spAutoFit/>
+          </a:bodyPr>
+          <a:lstStyle/>
+          <a:p>
+            <a:pPr algn="l">
+              <a:lnSpc>
+                <a:spcPct val="118000"/>
+              </a:lnSpc>
+            </a:pPr>
+            <a:r>
+              <a:rPr sz="919">
+                <a:solidFill>
+                  <a:srgbClr val="1F2933"/>
+                </a:solidFill>
+                <a:latin typeface="맑은 고딕"/>
+                <a:ea typeface="맑은 고딕"/>
+                <a:cs typeface="맑은 고딕"/>
+              </a:rPr>
+              <a:t>카드 근거만 인용해 추천문</a:t>
+            </a:r>
+          </a:p>
+          <a:p>
+            <a:pPr algn="l">
+              <a:lnSpc>
+                <a:spcPct val="118000"/>
+              </a:lnSpc>
+            </a:pPr>
+            <a:r>
+              <a:rPr sz="919">
+                <a:solidFill>
+                  <a:srgbClr val="1F2933"/>
+                </a:solidFill>
+                <a:latin typeface="맑은 고딕"/>
+                <a:ea typeface="맑은 고딕"/>
+                <a:cs typeface="맑은 고딕"/>
+              </a:rPr>
+              <a:t/>
+            </a:r>
+          </a:p>
+          <a:p>
+            <a:pPr algn="l">
+              <a:lnSpc>
+                <a:spcPct val="118000"/>
+              </a:lnSpc>
+            </a:pPr>
+            <a:r>
+              <a:rPr sz="919">
+                <a:solidFill>
+                  <a:srgbClr val="1F2933"/>
+                </a:solidFill>
+                <a:latin typeface="맑은 고딕"/>
+                <a:ea typeface="맑은 고딕"/>
+                <a:cs typeface="맑은 고딕"/>
+              </a:rPr>
+              <a:t>인용은 코드가 원문 대조 재검증</a:t>
+            </a:r>
+          </a:p>
+          <a:p>
+            <a:pPr algn="l">
+              <a:lnSpc>
+                <a:spcPct val="118000"/>
+              </a:lnSpc>
+            </a:pPr>
+            <a:r>
+              <a:rPr sz="919">
+                <a:solidFill>
+                  <a:srgbClr val="1F2933"/>
+                </a:solidFill>
+                <a:latin typeface="맑은 고딕"/>
+                <a:ea typeface="맑은 고딕"/>
+                <a:cs typeface="맑은 고딕"/>
+              </a:rPr>
+              <a:t>지어낸 인용은</a:t>
+            </a:r>
+          </a:p>
+          <a:p>
+            <a:pPr algn="l">
+              <a:lnSpc>
+                <a:spcPct val="118000"/>
+              </a:lnSpc>
+            </a:pPr>
+            <a:r>
+              <a:rPr sz="919">
+                <a:solidFill>
+                  <a:srgbClr val="1F2933"/>
+                </a:solidFill>
+                <a:latin typeface="맑은 고딕"/>
+                <a:ea typeface="맑은 고딕"/>
+                <a:cs typeface="맑은 고딕"/>
+              </a:rPr>
+              <a:t>구조적으로 불가능</a:t>
+            </a:r>
+          </a:p>
+        </p:txBody>
+      </p:sp>
+      <p:sp>
+        <p:nvSpPr>
+          <p:cNvPr id="53" name="Right Arrow 52"/>
+          <p:cNvSpPr/>
+          <p:nvPr/>
+        </p:nvSpPr>
+        <p:spPr>
+          <a:xfrm>
+            <a:off x="3014472" y="2866644"/>
+            <a:ext cx="310896" cy="164592"/>
+          </a:xfrm>
+          <a:prstGeom prst="rightArrow">
+            <a:avLst/>
+          </a:prstGeom>
+          <a:solidFill>
+            <a:srgbClr val="9AA9AC"/>
+          </a:solidFill>
+          <a:ln>
+            <a:noFill/>
+          </a:ln>
+          <a:effectLst/>
+        </p:spPr>
+        <p:style>
+          <a:lnRef idx="1">
+            <a:schemeClr val="accent1"/>
+          </a:lnRef>
+          <a:fillRef idx="3">
+            <a:schemeClr val="accent1"/>
+          </a:fillRef>
+          <a:effectRef idx="2">
+            <a:schemeClr val="accent1"/>
+          </a:effectRef>
+          <a:fontRef idx="minor">
+            <a:schemeClr val="lt1"/>
+          </a:fontRef>
+        </p:style>
+        <p:txBody>
+          <a:bodyPr rtlCol="0" anchor="ctr"/>
+          <a:lstStyle/>
+          <a:p>
+            <a:pPr algn="ctr"/>
+          </a:p>
+        </p:txBody>
+      </p:sp>
+      <p:sp>
+        <p:nvSpPr>
+          <p:cNvPr id="54" name="Right Arrow 53"/>
+          <p:cNvSpPr/>
+          <p:nvPr/>
+        </p:nvSpPr>
+        <p:spPr>
+          <a:xfrm>
+            <a:off x="5818632" y="2866644"/>
+            <a:ext cx="310896" cy="164592"/>
+          </a:xfrm>
+          <a:prstGeom prst="rightArrow">
+            <a:avLst/>
+          </a:prstGeom>
+          <a:solidFill>
+            <a:srgbClr val="9AA9AC"/>
+          </a:solidFill>
+          <a:ln>
+            <a:noFill/>
+          </a:ln>
+          <a:effectLst/>
+        </p:spPr>
+        <p:style>
+          <a:lnRef idx="1">
+            <a:schemeClr val="accent1"/>
+          </a:lnRef>
+          <a:fillRef idx="3">
+            <a:schemeClr val="accent1"/>
+          </a:fillRef>
+          <a:effectRef idx="2">
+            <a:schemeClr val="accent1"/>
+          </a:effectRef>
+          <a:fontRef idx="minor">
+            <a:schemeClr val="lt1"/>
+          </a:fontRef>
+        </p:style>
+        <p:txBody>
+          <a:bodyPr rtlCol="0" anchor="ctr"/>
+          <a:lstStyle/>
+          <a:p>
+            <a:pPr algn="ctr"/>
+          </a:p>
+        </p:txBody>
+      </p:sp>
+      <p:sp>
+        <p:nvSpPr>
+          <p:cNvPr id="55" name="Rounded Rectangle 54"/>
+          <p:cNvSpPr/>
+          <p:nvPr/>
+        </p:nvSpPr>
+        <p:spPr>
+          <a:xfrm>
+            <a:off x="502920" y="4224528"/>
+            <a:ext cx="8138160" cy="402336"/>
+          </a:xfrm>
+          <a:prstGeom prst="roundRect">
+            <a:avLst>
+              <a:gd name="adj" fmla="val 12000"/>
+            </a:avLst>
+          </a:prstGeom>
+          <a:solidFill>
+            <a:srgbClr val="F4F8F7"/>
+          </a:solidFill>
+          <a:ln w="12700">
+            <a:solidFill>
+              <a:srgbClr val="DCE6E3"/>
+            </a:solidFill>
+          </a:ln>
+          <a:effectLst/>
+        </p:spPr>
+        <p:style>
+          <a:lnRef idx="1">
+            <a:schemeClr val="accent1"/>
+          </a:lnRef>
+          <a:fillRef idx="3">
+            <a:schemeClr val="accent1"/>
+          </a:fillRef>
+          <a:effectRef idx="2">
+            <a:schemeClr val="accent1"/>
+          </a:effectRef>
+          <a:fontRef idx="minor">
+            <a:schemeClr val="lt1"/>
+          </a:fontRef>
+        </p:style>
+        <p:txBody>
+          <a:bodyPr rtlCol="0" anchor="ctr"/>
+          <a:lstStyle/>
+          <a:p>
+            <a:pPr algn="ctr"/>
+          </a:p>
+        </p:txBody>
+      </p:sp>
+      <p:sp>
+        <p:nvSpPr>
+          <p:cNvPr id="56" name="TextBox 55"/>
+          <p:cNvSpPr txBox="1"/>
+          <p:nvPr/>
+        </p:nvSpPr>
+        <p:spPr>
+          <a:xfrm>
+            <a:off x="502920" y="4224528"/>
+            <a:ext cx="8138160" cy="402336"/>
+          </a:xfrm>
+          <a:prstGeom prst="rect">
+            <a:avLst/>
+          </a:prstGeom>
+          <a:noFill/>
+        </p:spPr>
+        <p:txBody>
+          <a:bodyPr wrap="square" anchor="ctr" lIns="0" rIns="0" tIns="0" bIns="0">
+            <a:spAutoFit/>
+          </a:bodyPr>
+          <a:lstStyle/>
+          <a:p>
+            <a:pPr algn="ctr"/>
+            <a:r>
+              <a:rPr sz="1100" b="1">
+                <a:solidFill>
+                  <a:srgbClr val="0F5257"/>
+                </a:solidFill>
+                <a:latin typeface="맑은 고딕"/>
+                <a:ea typeface="맑은 고딕"/>
+                <a:cs typeface="맑은 고딕"/>
+              </a:rPr>
+              <a:t>판단은 LLM, 사실과 강제는 코드 — LLM은 양 끝 2회뿐, 가운데는 읽을 수 있는 코드</a:t>
+            </a:r>
           </a:p>
         </p:txBody>
       </p:sp>
